--- a/Slides das aulas/Git Python Jupyter VSCode/GIT01 - Instalação e criação do repositório online e local.pptx
+++ b/Slides das aulas/Git Python Jupyter VSCode/GIT01 - Instalação e criação do repositório online e local.pptx
@@ -146,23 +146,54 @@
 </p:presentation>
 </file>
 
+<file path=ppt/revisionInfo.xml><?xml version="1.0" encoding="utf-8"?>
+<p1510:revInfo xmlns:a="http://schemas.openxmlformats.org/drawingml/2006/main" xmlns:r="http://schemas.openxmlformats.org/officeDocument/2006/relationships" xmlns:p1510="http://schemas.microsoft.com/office/powerpoint/2015/10/main">
+  <p1510:revLst>
+    <p1510:client id="{D8CE39E7-0598-489A-8436-592EDF67D62E}" v="1" dt="2026-09-18T21:15:56.292"/>
+  </p1510:revLst>
+</p1510:revInfo>
+</file>
+
 <file path=ppt/changesInfos/changesInfo1.xml><?xml version="1.0" encoding="utf-8"?>
 <pc:chgInfo xmlns:a="http://schemas.openxmlformats.org/drawingml/2006/main" xmlns:r="http://schemas.openxmlformats.org/officeDocument/2006/relationships" xmlns:ac="http://schemas.microsoft.com/office/drawing/2013/main/command" xmlns:pc="http://schemas.microsoft.com/office/powerpoint/2013/main/command">
   <pc:docChgLst>
     <pc:chgData name="Bruno Augusto Nassif Travencolo" userId="9765cb90-d5ec-451e-8c7b-af57428794a1" providerId="ADAL" clId="{3A1B49F1-4182-408B-9E15-837E2809C242}"/>
-    <pc:docChg chg="modSld">
-      <pc:chgData name="Bruno Augusto Nassif Travencolo" userId="9765cb90-d5ec-451e-8c7b-af57428794a1" providerId="ADAL" clId="{3A1B49F1-4182-408B-9E15-837E2809C242}" dt="2026-04-24T19:10:13.673" v="1" actId="20577"/>
+    <pc:docChg chg="custSel modSld">
+      <pc:chgData name="Bruno Augusto Nassif Travencolo" userId="9765cb90-d5ec-451e-8c7b-af57428794a1" providerId="ADAL" clId="{3A1B49F1-4182-408B-9E15-837E2809C242}" dt="2026-09-18T21:18:44.684" v="41" actId="1076"/>
       <pc:docMkLst>
         <pc:docMk/>
       </pc:docMkLst>
+      <pc:sldChg chg="addSp modSp mod">
+        <pc:chgData name="Bruno Augusto Nassif Travencolo" userId="9765cb90-d5ec-451e-8c7b-af57428794a1" providerId="ADAL" clId="{3A1B49F1-4182-408B-9E15-837E2809C242}" dt="2026-09-18T21:18:44.684" v="41" actId="1076"/>
+        <pc:sldMkLst>
+          <pc:docMk/>
+          <pc:sldMk cId="3131205900" sldId="258"/>
+        </pc:sldMkLst>
+        <pc:spChg chg="add mod">
+          <ac:chgData name="Bruno Augusto Nassif Travencolo" userId="9765cb90-d5ec-451e-8c7b-af57428794a1" providerId="ADAL" clId="{3A1B49F1-4182-408B-9E15-837E2809C242}" dt="2026-09-18T21:18:44.684" v="41" actId="1076"/>
+          <ac:spMkLst>
+            <pc:docMk/>
+            <pc:sldMk cId="3131205900" sldId="258"/>
+            <ac:spMk id="2" creationId="{749AE96F-0B2B-7477-F547-41DCDA623CFF}"/>
+          </ac:spMkLst>
+        </pc:spChg>
+        <pc:spChg chg="mod">
+          <ac:chgData name="Bruno Augusto Nassif Travencolo" userId="9765cb90-d5ec-451e-8c7b-af57428794a1" providerId="ADAL" clId="{3A1B49F1-4182-408B-9E15-837E2809C242}" dt="2026-09-18T21:15:48.196" v="9" actId="6549"/>
+          <ac:spMkLst>
+            <pc:docMk/>
+            <pc:sldMk cId="3131205900" sldId="258"/>
+            <ac:spMk id="6" creationId="{B5FED38C-40B6-0524-EB26-4C145C5DD305}"/>
+          </ac:spMkLst>
+        </pc:spChg>
+      </pc:sldChg>
       <pc:sldChg chg="modSp mod">
-        <pc:chgData name="Bruno Augusto Nassif Travencolo" userId="9765cb90-d5ec-451e-8c7b-af57428794a1" providerId="ADAL" clId="{3A1B49F1-4182-408B-9E15-837E2809C242}" dt="2026-04-24T19:10:13.673" v="1" actId="20577"/>
+        <pc:chgData name="Bruno Augusto Nassif Travencolo" userId="9765cb90-d5ec-451e-8c7b-af57428794a1" providerId="ADAL" clId="{3A1B49F1-4182-408B-9E15-837E2809C242}" dt="2026-09-18T21:10:01.786" v="3" actId="20577"/>
         <pc:sldMkLst>
           <pc:docMk/>
           <pc:sldMk cId="3111443109" sldId="290"/>
         </pc:sldMkLst>
         <pc:spChg chg="mod">
-          <ac:chgData name="Bruno Augusto Nassif Travencolo" userId="9765cb90-d5ec-451e-8c7b-af57428794a1" providerId="ADAL" clId="{3A1B49F1-4182-408B-9E15-837E2809C242}" dt="2026-04-24T19:10:13.673" v="1" actId="20577"/>
+          <ac:chgData name="Bruno Augusto Nassif Travencolo" userId="9765cb90-d5ec-451e-8c7b-af57428794a1" providerId="ADAL" clId="{3A1B49F1-4182-408B-9E15-837E2809C242}" dt="2026-09-18T21:10:01.786" v="3" actId="20577"/>
           <ac:spMkLst>
             <pc:docMk/>
             <pc:sldMk cId="3111443109" sldId="290"/>
@@ -322,7 +353,7 @@
           <a:p>
             <a:fld id="{7E6968AD-0A46-4EE6-B4F0-1FFCF5E28B8F}" type="datetimeFigureOut">
               <a:rPr lang="pt-BR" smtClean="0"/>
-              <a:t>24/04/2026</a:t>
+              <a:t>18/09/2026</a:t>
             </a:fld>
             <a:endParaRPr lang="pt-BR"/>
           </a:p>
@@ -520,7 +551,7 @@
           <a:p>
             <a:fld id="{7E6968AD-0A46-4EE6-B4F0-1FFCF5E28B8F}" type="datetimeFigureOut">
               <a:rPr lang="pt-BR" smtClean="0"/>
-              <a:t>24/04/2026</a:t>
+              <a:t>18/09/2026</a:t>
             </a:fld>
             <a:endParaRPr lang="pt-BR"/>
           </a:p>
@@ -728,7 +759,7 @@
           <a:p>
             <a:fld id="{7E6968AD-0A46-4EE6-B4F0-1FFCF5E28B8F}" type="datetimeFigureOut">
               <a:rPr lang="pt-BR" smtClean="0"/>
-              <a:t>24/04/2026</a:t>
+              <a:t>18/09/2026</a:t>
             </a:fld>
             <a:endParaRPr lang="pt-BR"/>
           </a:p>
@@ -926,7 +957,7 @@
           <a:p>
             <a:fld id="{7E6968AD-0A46-4EE6-B4F0-1FFCF5E28B8F}" type="datetimeFigureOut">
               <a:rPr lang="pt-BR" smtClean="0"/>
-              <a:t>24/04/2026</a:t>
+              <a:t>18/09/2026</a:t>
             </a:fld>
             <a:endParaRPr lang="pt-BR"/>
           </a:p>
@@ -1201,7 +1232,7 @@
           <a:p>
             <a:fld id="{7E6968AD-0A46-4EE6-B4F0-1FFCF5E28B8F}" type="datetimeFigureOut">
               <a:rPr lang="pt-BR" smtClean="0"/>
-              <a:t>24/04/2026</a:t>
+              <a:t>18/09/2026</a:t>
             </a:fld>
             <a:endParaRPr lang="pt-BR"/>
           </a:p>
@@ -1466,7 +1497,7 @@
           <a:p>
             <a:fld id="{7E6968AD-0A46-4EE6-B4F0-1FFCF5E28B8F}" type="datetimeFigureOut">
               <a:rPr lang="pt-BR" smtClean="0"/>
-              <a:t>24/04/2026</a:t>
+              <a:t>18/09/2026</a:t>
             </a:fld>
             <a:endParaRPr lang="pt-BR"/>
           </a:p>
@@ -1878,7 +1909,7 @@
           <a:p>
             <a:fld id="{7E6968AD-0A46-4EE6-B4F0-1FFCF5E28B8F}" type="datetimeFigureOut">
               <a:rPr lang="pt-BR" smtClean="0"/>
-              <a:t>24/04/2026</a:t>
+              <a:t>18/09/2026</a:t>
             </a:fld>
             <a:endParaRPr lang="pt-BR"/>
           </a:p>
@@ -2019,7 +2050,7 @@
           <a:p>
             <a:fld id="{7E6968AD-0A46-4EE6-B4F0-1FFCF5E28B8F}" type="datetimeFigureOut">
               <a:rPr lang="pt-BR" smtClean="0"/>
-              <a:t>24/04/2026</a:t>
+              <a:t>18/09/2026</a:t>
             </a:fld>
             <a:endParaRPr lang="pt-BR"/>
           </a:p>
@@ -2132,7 +2163,7 @@
           <a:p>
             <a:fld id="{7E6968AD-0A46-4EE6-B4F0-1FFCF5E28B8F}" type="datetimeFigureOut">
               <a:rPr lang="pt-BR" smtClean="0"/>
-              <a:t>24/04/2026</a:t>
+              <a:t>18/09/2026</a:t>
             </a:fld>
             <a:endParaRPr lang="pt-BR"/>
           </a:p>
@@ -2443,7 +2474,7 @@
           <a:p>
             <a:fld id="{7E6968AD-0A46-4EE6-B4F0-1FFCF5E28B8F}" type="datetimeFigureOut">
               <a:rPr lang="pt-BR" smtClean="0"/>
-              <a:t>24/04/2026</a:t>
+              <a:t>18/09/2026</a:t>
             </a:fld>
             <a:endParaRPr lang="pt-BR"/>
           </a:p>
@@ -2731,7 +2762,7 @@
           <a:p>
             <a:fld id="{7E6968AD-0A46-4EE6-B4F0-1FFCF5E28B8F}" type="datetimeFigureOut">
               <a:rPr lang="pt-BR" smtClean="0"/>
-              <a:t>24/04/2026</a:t>
+              <a:t>18/09/2026</a:t>
             </a:fld>
             <a:endParaRPr lang="pt-BR"/>
           </a:p>
@@ -2972,7 +3003,7 @@
           <a:p>
             <a:fld id="{7E6968AD-0A46-4EE6-B4F0-1FFCF5E28B8F}" type="datetimeFigureOut">
               <a:rPr lang="pt-BR" smtClean="0"/>
-              <a:t>24/04/2026</a:t>
+              <a:t>18/09/2026</a:t>
             </a:fld>
             <a:endParaRPr lang="pt-BR"/>
           </a:p>
@@ -3464,7 +3495,7 @@
           <a:p>
             <a:r>
               <a:rPr lang="pt-BR" dirty="0"/>
-              <a:t>https://github.com/btravencolo/gbc216-labs-2026-01</a:t>
+              <a:t>https://github.com/btravencolo/gbc216-labs-2026-02</a:t>
             </a:r>
           </a:p>
         </p:txBody>
@@ -10106,7 +10137,7 @@
             <a:pPr algn="ctr"/>
             <a:r>
               <a:rPr lang="pt-BR" dirty="0"/>
-              <a:t>Nome do repositório. Cada aluno terá um nome diferente que está indicado no Teams</a:t>
+              <a:t>Nome do repositório. Cada GRUPO terá um nome diferente</a:t>
             </a:r>
           </a:p>
           <a:p>
@@ -10163,6 +10194,54 @@
             <a:r>
               <a:rPr lang="pt-BR"/>
               <a:t>Private</a:t>
+            </a:r>
+          </a:p>
+        </p:txBody>
+      </p:sp>
+      <p:sp>
+        <p:nvSpPr>
+          <p:cNvPr id="2" name="CaixaDeTexto 1">
+            <a:extLst>
+              <a:ext uri="{FF2B5EF4-FFF2-40B4-BE49-F238E27FC236}">
+                <a16:creationId xmlns:a16="http://schemas.microsoft.com/office/drawing/2014/main" id="{749AE96F-0B2B-7477-F547-41DCDA623CFF}"/>
+              </a:ext>
+            </a:extLst>
+          </p:cNvPr>
+          <p:cNvSpPr txBox="1"/>
+          <p:nvPr/>
+        </p:nvSpPr>
+        <p:spPr>
+          <a:xfrm>
+            <a:off x="8297042" y="4560875"/>
+            <a:ext cx="3552670" cy="646331"/>
+          </a:xfrm>
+          <a:prstGeom prst="rect">
+            <a:avLst/>
+          </a:prstGeom>
+        </p:spPr>
+        <p:style>
+          <a:lnRef idx="1">
+            <a:schemeClr val="accent1"/>
+          </a:lnRef>
+          <a:fillRef idx="3">
+            <a:schemeClr val="accent1"/>
+          </a:fillRef>
+          <a:effectRef idx="2">
+            <a:schemeClr val="accent1"/>
+          </a:effectRef>
+          <a:fontRef idx="minor">
+            <a:schemeClr val="lt1"/>
+          </a:fontRef>
+        </p:style>
+        <p:txBody>
+          <a:bodyPr wrap="square" rtlCol="0">
+            <a:spAutoFit/>
+          </a:bodyPr>
+          <a:lstStyle/>
+          <a:p>
+            <a:r>
+              <a:rPr lang="pt-BR" sz="3600" dirty="0"/>
+              <a:t>gbc216_t4_Gxx</a:t>
             </a:r>
           </a:p>
         </p:txBody>
@@ -10536,6 +10615,12 @@
 </file>
 
 <file path=customXml/item1.xml><?xml version="1.0" encoding="utf-8"?>
+<p:properties xmlns:p="http://schemas.microsoft.com/office/2006/metadata/properties" xmlns:xsi="http://www.w3.org/2001/XMLSchema-instance" xmlns:pc="http://schemas.microsoft.com/office/infopath/2007/PartnerControls">
+  <documentManagement/>
+</p:properties>
+</file>
+
+<file path=customXml/item2.xml><?xml version="1.0" encoding="utf-8"?>
 <ct:contentTypeSchema xmlns:ct="http://schemas.microsoft.com/office/2006/metadata/contentType" xmlns:ma="http://schemas.microsoft.com/office/2006/metadata/properties/metaAttributes" ct:_="" ma:_="" ma:contentTypeName="Documento" ma:contentTypeID="0x01010097B6610C1FC8AB48BA79369D9F0FA2AE" ma:contentTypeVersion="3" ma:contentTypeDescription="Crie um novo documento." ma:contentTypeScope="" ma:versionID="a156716847e7342aca01295d584a094b">
   <xsd:schema xmlns:xsd="http://www.w3.org/2001/XMLSchema" xmlns:xs="http://www.w3.org/2001/XMLSchema" xmlns:p="http://schemas.microsoft.com/office/2006/metadata/properties" xmlns:ns2="4fdbd140-fb76-48f8-85b7-41ace7287746" targetNamespace="http://schemas.microsoft.com/office/2006/metadata/properties" ma:root="true" ma:fieldsID="57b2eef0319d860a6d1394171163fad3" ns2:_="">
     <xsd:import namespace="4fdbd140-fb76-48f8-85b7-41ace7287746"/>
@@ -10673,12 +10758,6 @@
 </ct:contentTypeSchema>
 </file>
 
-<file path=customXml/item2.xml><?xml version="1.0" encoding="utf-8"?>
-<p:properties xmlns:p="http://schemas.microsoft.com/office/2006/metadata/properties" xmlns:xsi="http://www.w3.org/2001/XMLSchema-instance" xmlns:pc="http://schemas.microsoft.com/office/infopath/2007/PartnerControls">
-  <documentManagement/>
-</p:properties>
-</file>
-
 <file path=customXml/item3.xml><?xml version="1.0" encoding="utf-8"?>
 <?mso-contentType ?>
 <FormTemplates xmlns="http://schemas.microsoft.com/sharepoint/v3/contenttype/forms">
@@ -10689,10 +10768,6 @@
 </file>
 
 <file path=customXml/itemProps1.xml><?xml version="1.0" encoding="utf-8"?>
-<ds:datastoreItem xmlns:ds="http://schemas.openxmlformats.org/officeDocument/2006/customXml" ds:itemID="{8C600153-8218-4571-9251-BB20A47E8214}"/>
-</file>
-
-<file path=customXml/itemProps2.xml><?xml version="1.0" encoding="utf-8"?>
 <ds:datastoreItem xmlns:ds="http://schemas.openxmlformats.org/officeDocument/2006/customXml" ds:itemID="{0C1C82AF-A570-4B03-A41D-2FD8F8C415E0}">
   <ds:schemaRefs>
     <ds:schemaRef ds:uri="http://purl.org/dc/elements/1.1/"/>
@@ -10707,6 +10782,24 @@
 </ds:datastoreItem>
 </file>
 
+<file path=customXml/itemProps2.xml><?xml version="1.0" encoding="utf-8"?>
+<ds:datastoreItem xmlns:ds="http://schemas.openxmlformats.org/officeDocument/2006/customXml" ds:itemID="{8C600153-8218-4571-9251-BB20A47E8214}">
+  <ds:schemaRefs>
+    <ds:schemaRef ds:uri="http://schemas.microsoft.com/office/2006/metadata/contentType"/>
+    <ds:schemaRef ds:uri="http://schemas.microsoft.com/office/2006/metadata/properties/metaAttributes"/>
+    <ds:schemaRef ds:uri="http://www.w3.org/2001/XMLSchema"/>
+    <ds:schemaRef ds:uri="http://schemas.microsoft.com/office/2006/metadata/properties"/>
+    <ds:schemaRef ds:uri="4fdbd140-fb76-48f8-85b7-41ace7287746"/>
+    <ds:schemaRef ds:uri="http://schemas.microsoft.com/office/2006/documentManagement/types"/>
+    <ds:schemaRef ds:uri="http://schemas.microsoft.com/office/infopath/2007/PartnerControls"/>
+    <ds:schemaRef ds:uri="http://schemas.openxmlformats.org/package/2006/metadata/core-properties"/>
+    <ds:schemaRef ds:uri="http://purl.org/dc/elements/1.1/"/>
+    <ds:schemaRef ds:uri="http://purl.org/dc/terms/"/>
+    <ds:schemaRef ds:uri="http://schemas.microsoft.com/internal/obd"/>
+  </ds:schemaRefs>
+</ds:datastoreItem>
+</file>
+
 <file path=customXml/itemProps3.xml><?xml version="1.0" encoding="utf-8"?>
 <ds:datastoreItem xmlns:ds="http://schemas.openxmlformats.org/officeDocument/2006/customXml" ds:itemID="{1BC03136-417E-4B30-A6C9-9F4D661AC7F0}">
   <ds:schemaRefs>
